--- a/pptx/midterm/REMUS_Progress_Slide_7.pptx
+++ b/pptx/midterm/REMUS_Progress_Slide_7.pptx
@@ -775,7 +775,7 @@
 </file>
 
 <file path=ppt/slides/slide1.xml><?xml version="1.0" encoding="utf-8"?>
-<p:sld xmlns:a="http://schemas.openxmlformats.org/drawingml/2006/main" xmlns:p="http://schemas.openxmlformats.org/presentationml/2006/main">
+<p:sld xmlns:r="http://schemas.openxmlformats.org/officeDocument/2006/relationships" xmlns:a="http://schemas.openxmlformats.org/drawingml/2006/main" xmlns:p="http://schemas.openxmlformats.org/presentationml/2006/main">
   <p:cSld>
     <p:bg>
       <p:bgPr>
@@ -823,7 +823,7 @@
                 <a:latin typeface="Arial"/>
                 <a:ea typeface="Arial"/>
               </a:rPr>
-              <a:t>Distributed State Capture, Restore and Replay</a:t>
+              <a:t>7. Distributed State Capture, Restore and Replay</a:t>
             </a:r>
           </a:p>
         </p:txBody>

--- a/pptx/midterm/REMUS_Progress_Slide_7.pptx
+++ b/pptx/midterm/REMUS_Progress_Slide_7.pptx
@@ -5,10 +5,10 @@
     <p:sldMasterId xmlns:r="http://schemas.openxmlformats.org/officeDocument/2006/relationships" id="2147483648" r:id="rId1"/>
   </p:sldMasterIdLst>
   <p:notesMasterIdLst>
-    <p:notesMasterId r:id="Re8bf98adfc1c470d"/>
+    <p:notesMasterId r:id="R62912b865ce24d71"/>
   </p:notesMasterIdLst>
   <p:sldIdLst>
-    <p:sldId id="256" r:id="Rf3fffa0e0cec490c"/>
+    <p:sldId id="256" r:id="R482a666acd344f90"/>
   </p:sldIdLst>
   <p:sldSz cx="12192000" cy="6858000" type="screen16x9"/>
   <p:notesSz cx="6858000" cy="9144000"/>
@@ -471,7 +471,7 @@
           <a:p xmlns:a="http://schemas.openxmlformats.org/drawingml/2006/main">
             <a:r>
               <a:rPr lang="en-US"/>
-              <a:t>The previous slide establishes a common DUT cycle. REMUS reuses REMU's local Scan Dump and organizes per-partition scan files as a Global Snapshot. Memory and input management retain the existing REMU mechanisms. FPGA Restore writes each partition's scan data back to the corresponding FPGA with the matching design and scan layout, restoring local registers and SRAM plus the memory-model data before execution resumes. Software restoration instead decodes local scan positions through state mapping and loads the corresponding RTL objects. Recorded inputs are replayed by logical cycle, enabling waveform observation. The user-approved conclusion summarizes reported tested functionality; it is not an all-state or all-cycle equivalence assertion. The displayed image specifically compares a TWO-PARTITION COSIM checkpoint at cycle 42080 with Icarus Verilog software RTL replay from checkpoint 2048. Six selected signals match at relative cycle 40032. Inputs remain unchanged after 2048 in this example. It is not a physical-board restore screenshot. The author separately confirmed board-vs-Cosim checkpoint consistency and FPGA restoration/replay results; original board comparison records are still being archived. Do not present this software example as direct evidence of physical FPGA restore or merge different observation sets into a full equivalence claim. Sources: src/midterm/progress/state_replay.tex; experiments/picorv32-cosim-replay.md; experiments/board-execution.md. Design: figure/presentation-reference/midterm-state-replay-07-v2.png. All slide text is editable; the experiment screenshot is an unchanged raster.</a:t>
+              <a:t>The previous slide establishes a common DUT cycle. REMUS reuses REMU's local Scan Dump and organizes per-partition scan files as a Global Snapshot. Memory and input management retain the existing REMU mechanisms. FPGA Restore writes each partition's scan data back to the corresponding FPGA with the matching design and scan layout, restoring local registers and SRAM plus the memory-model data before execution resumes. Software restoration instead decodes local scan positions through state mapping and loads the corresponding RTL objects. Recorded inputs are replayed by logical cycle, enabling waveform observation. The user-approved conclusion summarizes reported tested functionality; it is not an all-state or all-cycle equivalence assertion. The displayed image specifically compares a TWO-PARTITION COSIM checkpoint at cycle 42080 with Icarus Verilog software RTL replay from checkpoint 2048. Six selected signals match at relative cycle 40032. Inputs remain unchanged after 2048 in this example. It is not a physical-board restore screenshot. The author separately confirmed board-vs-Cosim checkpoint consistency and FPGA restoration/replay results; original board comparison records are still being archived. Do not present this software example as direct evidence of physical FPGA restore or merge different observation sets into a full equivalence claim. Sources: src/midterm/progress/state_replay.tex; experiments/picorv32-cosim-replay.md; experiments/board-execution.md. Design: figure/presentation-reference/midterm-state-replay-07-v2.png. All slide text is editable; the experiment screenshot is an unchanged raster. Reference [1]: Y. Chen et al. REMU: Enabling Cost-Effective Checkpointing and Deterministic Replay in FPGA-based Emulation. ICCD, 2023, pp. 21–29. DOI: 10.1109/ICCD58817.2023.00014.</a:t>
             </a:r>
           </a:p>
         </p:txBody>
@@ -775,8 +775,8 @@
 </file>
 
 <file path=ppt/slides/slide1.xml><?xml version="1.0" encoding="utf-8"?>
-<p:sld xmlns:r="http://schemas.openxmlformats.org/officeDocument/2006/relationships" xmlns:a="http://schemas.openxmlformats.org/drawingml/2006/main" xmlns:p="http://schemas.openxmlformats.org/presentationml/2006/main">
-  <p:cSld>
+<p:sld xmlns:a="http://schemas.openxmlformats.org/drawingml/2006/main" xmlns:r="http://schemas.openxmlformats.org/officeDocument/2006/relationships" xmlns:p="http://schemas.openxmlformats.org/presentationml/2006/main">
+  <p:cSld xmlns:a="http://schemas.openxmlformats.org/drawingml/2006/main" xmlns:p="http://schemas.openxmlformats.org/presentationml/2006/main" xmlns:r="http://schemas.openxmlformats.org/officeDocument/2006/relationships">
     <p:bg>
       <p:bgPr>
         <a:solidFill xmlns:a="http://schemas.openxmlformats.org/drawingml/2006/main">
@@ -814,16 +814,35 @@
             <a:noAutofit/>
           </a:bodyPr>
           <a:lstStyle xmlns:a="http://schemas.openxmlformats.org/drawingml/2006/main"/>
-          <a:p xmlns:a="http://schemas.openxmlformats.org/drawingml/2006/main">
+          <a:p>
+            <a:pPr algn="l">
+              <a:lnSpc>
+                <a:spcPct val="90000"/>
+              </a:lnSpc>
+              <a:defRPr sz="3000" b="1">
+                <a:solidFill>
+                  <a:srgbClr val="183B56"/>
+                </a:solidFill>
+                <a:latin typeface="Arial"/>
+                <a:ea typeface="Arial"/>
+              </a:defRPr>
+            </a:pPr>
             <a:r>
               <a:rPr lang="en-US" sz="3000" b="1">
                 <a:solidFill>
                   <a:srgbClr val="183B56"/>
                 </a:solidFill>
-                <a:latin typeface="Arial"/>
-                <a:ea typeface="Arial"/>
-              </a:rPr>
-              <a:t>7. Distributed State Capture, Restore and Replay</a:t>
+              </a:rPr>
+              <a:t xml:space="preserve">Progress2: Distributed </a:t>
+            </a:r>
+            <a:r>
+              <a:rPr lang="en-US" sz="3000" b="1">
+                <a:solidFill>
+                  <a:srgbClr val="183B56"/>
+                </a:solidFill>
+                <a:latin typeface="Arial"/>
+              </a:rPr>
+              <a:t>State Capture, Restore and Replay</a:t>
             </a:r>
           </a:p>
         </p:txBody>
@@ -949,8 +968,8 @@
         </p:nvSpPr>
         <p:spPr>
           <a:xfrm>
-            <a:off x="365760" y="1856232"/>
-            <a:ext cx="5074920" cy="548640"/>
+            <a:off x="365759" y="1856232"/>
+            <a:ext cx="5291121" cy="548640"/>
           </a:xfrm>
           <a:prstGeom prst="rect">
             <a:avLst/>
@@ -966,16 +985,34 @@
           </a:bodyPr>
           <a:lstStyle/>
           <a:p>
-            <a:r>
-              <a:rPr lang="en-US" sz="1800">
+            <a:pPr algn="l">
+              <a:defRPr sz="1800" b="0">
                 <a:solidFill>
                   <a:srgbClr val="20354A"/>
                 </a:solidFill>
                 <a:latin typeface="Arial"/>
                 <a:ea typeface="Arial"/>
-              </a:rPr>
-              <a:t>Capture partition states at the same DUT cycle.</a:t>
-            </a:r>
+              </a:defRPr>
+            </a:pPr>
+            <a:r>
+              <a:rPr lang="en-US">
+                <a:solidFill>
+                  <a:srgbClr val="20354A"/>
+                </a:solidFill>
+              </a:rPr>
+              <a:t>Reuse REMU's Scan Dump mechanism</a:t>
+            </a:r>
+            <a:r>
+              <a:rPr lang="en-US" baseline="30000">
+                <a:solidFill>
+                  <a:srgbClr val="20354A"/>
+                </a:solidFill>
+              </a:rPr>
+              <a:t>[1]</a:t>
+            </a:r>
+          </a:p>
+          <a:p>
+            <a:endParaRPr lang="en-US" sz="1800"/>
           </a:p>
         </p:txBody>
       </p:sp>
@@ -1004,15 +1041,41 @@
           </a:bodyPr>
           <a:lstStyle/>
           <a:p>
+            <a:pPr algn="l">
+              <a:defRPr sz="1800" b="0">
+                <a:solidFill>
+                  <a:srgbClr val="20354A"/>
+                </a:solidFill>
+                <a:latin typeface="Arial"/>
+                <a:ea typeface="Arial"/>
+              </a:defRPr>
+            </a:pPr>
             <a:r>
               <a:rPr lang="en-US" sz="1800">
                 <a:solidFill>
                   <a:srgbClr val="20354A"/>
                 </a:solidFill>
                 <a:latin typeface="Arial"/>
-                <a:ea typeface="Arial"/>
-              </a:rPr>
-              <a:t>Reuse REMU's Scan Dump mechanism.</a:t>
+              </a:rPr>
+              <a:t>Collect</a:t>
+            </a:r>
+            <a:r>
+              <a:rPr lang="en-US" sz="1800">
+                <a:solidFill>
+                  <a:srgbClr val="20354A"/>
+                </a:solidFill>
+                <a:latin typeface="Arial"/>
+              </a:rPr>
+              <a:t xml:space="preserve"> </a:t>
+            </a:r>
+            <a:r>
+              <a:rPr lang="en-US" sz="1800">
+                <a:solidFill>
+                  <a:srgbClr val="20354A"/>
+                </a:solidFill>
+                <a:latin typeface="Arial"/>
+              </a:rPr>
+              <a:t>and merge each partition’s states</a:t>
             </a:r>
           </a:p>
         </p:txBody>
@@ -1118,15 +1181,23 @@
           </a:bodyPr>
           <a:lstStyle/>
           <a:p>
+            <a:pPr algn="l">
+              <a:defRPr sz="1800" b="0">
+                <a:solidFill>
+                  <a:srgbClr val="20354A"/>
+                </a:solidFill>
+                <a:latin typeface="Arial"/>
+                <a:ea typeface="Arial"/>
+              </a:defRPr>
+            </a:pPr>
             <a:r>
               <a:rPr lang="en-US" sz="1800">
                 <a:solidFill>
                   <a:srgbClr val="20354A"/>
                 </a:solidFill>
                 <a:latin typeface="Arial"/>
-                <a:ea typeface="Arial"/>
-              </a:rPr>
-              <a:t>Write back scan data </a:t>
+              </a:rPr>
+              <a:t xml:space="preserve">Write back scan data </a:t>
             </a:r>
             <a:r>
               <a:rPr lang="en-US" sz="1800" b="1">
@@ -1134,19 +1205,8 @@
                   <a:srgbClr val="183B56"/>
                 </a:solidFill>
                 <a:latin typeface="Arial"/>
-                <a:ea typeface="Arial"/>
               </a:rPr>
               <a:t>by partition</a:t>
-            </a:r>
-            <a:r>
-              <a:rPr lang="en-US" sz="1800">
-                <a:solidFill>
-                  <a:srgbClr val="20354A"/>
-                </a:solidFill>
-                <a:latin typeface="Arial"/>
-                <a:ea typeface="Arial"/>
-              </a:rPr>
-              <a:t>.</a:t>
             </a:r>
           </a:p>
         </p:txBody>
@@ -1176,15 +1236,23 @@
           </a:bodyPr>
           <a:lstStyle/>
           <a:p>
-            <a:r>
-              <a:rPr lang="en-US" sz="1800">
+            <a:pPr algn="l">
+              <a:defRPr sz="1800" b="0">
                 <a:solidFill>
                   <a:srgbClr val="20354A"/>
                 </a:solidFill>
                 <a:latin typeface="Arial"/>
                 <a:ea typeface="Arial"/>
-              </a:rPr>
-              <a:t>Restore local registers, SRAM and memory.</a:t>
+              </a:defRPr>
+            </a:pPr>
+            <a:r>
+              <a:rPr sz="1800">
+                <a:solidFill>
+                  <a:srgbClr val="20354A"/>
+                </a:solidFill>
+                <a:latin typeface="Arial"/>
+              </a:rPr>
+              <a:t>Restore local registers, SRAM and memory</a:t>
             </a:r>
           </a:p>
         </p:txBody>
@@ -1290,15 +1358,23 @@
           </a:bodyPr>
           <a:lstStyle/>
           <a:p>
+            <a:pPr algn="l">
+              <a:defRPr sz="1800" b="0">
+                <a:solidFill>
+                  <a:srgbClr val="20354A"/>
+                </a:solidFill>
+                <a:latin typeface="Arial"/>
+                <a:ea typeface="Arial"/>
+              </a:defRPr>
+            </a:pPr>
             <a:r>
               <a:rPr lang="en-US" sz="1800">
                 <a:solidFill>
                   <a:srgbClr val="20354A"/>
                 </a:solidFill>
                 <a:latin typeface="Arial"/>
-                <a:ea typeface="Arial"/>
-              </a:rPr>
-              <a:t>Decode partition data through </a:t>
+              </a:rPr>
+              <a:t xml:space="preserve">Decode partition data through </a:t>
             </a:r>
             <a:r>
               <a:rPr lang="en-US" sz="1800" b="1">
@@ -1306,19 +1382,8 @@
                   <a:srgbClr val="183B56"/>
                 </a:solidFill>
                 <a:latin typeface="Arial"/>
-                <a:ea typeface="Arial"/>
               </a:rPr>
               <a:t>state mapping</a:t>
-            </a:r>
-            <a:r>
-              <a:rPr lang="en-US" sz="1800">
-                <a:solidFill>
-                  <a:srgbClr val="20354A"/>
-                </a:solidFill>
-                <a:latin typeface="Arial"/>
-                <a:ea typeface="Arial"/>
-              </a:rPr>
-              <a:t>.</a:t>
             </a:r>
           </a:p>
         </p:txBody>
@@ -1348,53 +1413,23 @@
           </a:bodyPr>
           <a:lstStyle/>
           <a:p>
-            <a:r>
-              <a:rPr lang="en-US" sz="1800">
+            <a:pPr algn="l">
+              <a:defRPr sz="1800" b="0">
                 <a:solidFill>
                   <a:srgbClr val="20354A"/>
                 </a:solidFill>
                 <a:latin typeface="Arial"/>
                 <a:ea typeface="Arial"/>
-              </a:rPr>
-              <a:t>Load RTL states and replay recorded inputs.</a:t>
-            </a:r>
-          </a:p>
-        </p:txBody>
-      </p:sp>
-      <p:sp>
-        <p:nvSpPr>
-          <p:cNvPr id="100013" name="S07.Evidence.Source"/>
-          <p:cNvSpPr txBox="1"/>
-          <p:nvPr/>
-        </p:nvSpPr>
-        <p:spPr>
-          <a:xfrm>
-            <a:off x="5806440" y="1645920"/>
-            <a:ext cx="6071616" cy="228600"/>
-          </a:xfrm>
-          <a:prstGeom prst="rect">
-            <a:avLst/>
-          </a:prstGeom>
-          <a:noFill/>
-          <a:ln>
-            <a:noFill/>
-          </a:ln>
-        </p:spPr>
-        <p:txBody>
-          <a:bodyPr lIns="0" tIns="0" rIns="0" bIns="0">
-            <a:noAutofit/>
-          </a:bodyPr>
-          <a:lstStyle/>
-          <a:p>
-            <a:r>
-              <a:rPr lang="en-US" sz="1200">
-                <a:solidFill>
-                  <a:srgbClr val="607184"/>
-                </a:solidFill>
-                <a:latin typeface="Arial"/>
-                <a:ea typeface="Arial"/>
-              </a:rPr>
-              <a:t>Cosim checkpoint / RTL replay</a:t>
+              </a:defRPr>
+            </a:pPr>
+            <a:r>
+              <a:rPr sz="1800">
+                <a:solidFill>
+                  <a:srgbClr val="20354A"/>
+                </a:solidFill>
+                <a:latin typeface="Arial"/>
+              </a:rPr>
+              <a:t>Load RTL states and replay recorded inputs</a:t>
             </a:r>
           </a:p>
         </p:txBody>
@@ -1408,7 +1443,7 @@
           <p:nvPr/>
         </p:nvPicPr>
         <p:blipFill>
-          <a:blip xmlns:r="http://schemas.openxmlformats.org/officeDocument/2006/relationships" r:embed="R05493bfb9f5f4d15"/>
+          <a:blip xmlns:r="http://schemas.openxmlformats.org/officeDocument/2006/relationships" r:embed="R8d9fedf5f1c7412b"/>
           <a:stretch>
             <a:fillRect/>
           </a:stretch>
@@ -1448,27 +1483,34 @@
           </a:bodyPr>
           <a:lstStyle/>
           <a:p>
+            <a:pPr algn="l">
+              <a:defRPr sz="2000" b="0">
+                <a:solidFill>
+                  <a:srgbClr val="183B56"/>
+                </a:solidFill>
+                <a:latin typeface="Arial"/>
+                <a:ea typeface="Arial"/>
+              </a:defRPr>
+            </a:pPr>
+            <a:r>
+              <a:rPr sz="2000">
+                <a:solidFill>
+                  <a:srgbClr val="183B56"/>
+                </a:solidFill>
+                <a:latin typeface="Arial"/>
+              </a:rPr>
+              <a:t>Waveform replay reproduces the same signal</a:t>
+            </a:r>
+          </a:p>
+          <a:p>
             <a:r>
               <a:rPr lang="en-US" sz="2000">
                 <a:solidFill>
                   <a:srgbClr val="183B56"/>
                 </a:solidFill>
                 <a:latin typeface="Arial"/>
-                <a:ea typeface="Arial"/>
-              </a:rPr>
-              <a:t>Waveform replay reproduces the same signal</a:t>
-            </a:r>
-          </a:p>
-          <a:p>
-            <a:r>
-              <a:rPr lang="en-US" sz="2000">
-                <a:solidFill>
-                  <a:srgbClr val="183B56"/>
-                </a:solidFill>
-                <a:latin typeface="Arial"/>
-                <a:ea typeface="Arial"/>
-              </a:rPr>
-              <a:t>values as FPGA execution.</a:t>
+              </a:rPr>
+              <a:t>values as FPGA execution</a:t>
             </a:r>
           </a:p>
         </p:txBody>
@@ -1508,6 +1550,44 @@
                 <a:ea typeface="Arial"/>
               </a:rPr>
               <a:t>7</a:t>
+            </a:r>
+          </a:p>
+        </p:txBody>
+      </p:sp>
+      <p:sp>
+        <p:nvSpPr>
+          <p:cNvPr id="100017" name="S07.Reference1"/>
+          <p:cNvSpPr txBox="1"/>
+          <p:nvPr/>
+        </p:nvSpPr>
+        <p:spPr>
+          <a:xfrm>
+            <a:off x="365760" y="6455664"/>
+            <a:ext cx="11109960" cy="256032"/>
+          </a:xfrm>
+          <a:prstGeom prst="rect">
+            <a:avLst/>
+          </a:prstGeom>
+          <a:noFill/>
+          <a:ln>
+            <a:noFill/>
+          </a:ln>
+        </p:spPr>
+        <p:txBody>
+          <a:bodyPr lIns="0" tIns="0" rIns="0" bIns="0">
+            <a:noAutofit/>
+          </a:bodyPr>
+          <a:lstStyle/>
+          <a:p>
+            <a:r>
+              <a:rPr lang="en-US" sz="1000">
+                <a:solidFill>
+                  <a:srgbClr val="607184"/>
+                </a:solidFill>
+                <a:latin typeface="Arial"/>
+                <a:ea typeface="Arial"/>
+              </a:rPr>
+              <a:t>[1] Y. Chen et al. REMU: Enabling Cost-Effective Checkpointing and Deterministic Replay in FPGA-based Emulation. ICCD, 2023, pp. 21–29.</a:t>
             </a:r>
           </a:p>
         </p:txBody>

--- a/pptx/midterm/REMUS_Progress_Slide_7.pptx
+++ b/pptx/midterm/REMUS_Progress_Slide_7.pptx
@@ -5,10 +5,10 @@
     <p:sldMasterId xmlns:r="http://schemas.openxmlformats.org/officeDocument/2006/relationships" id="2147483648" r:id="rId1"/>
   </p:sldMasterIdLst>
   <p:notesMasterIdLst>
-    <p:notesMasterId r:id="R62912b865ce24d71"/>
+    <p:notesMasterId r:id="R476946f9f6fb428c"/>
   </p:notesMasterIdLst>
   <p:sldIdLst>
-    <p:sldId id="256" r:id="R482a666acd344f90"/>
+    <p:sldId id="256" r:id="Rf5b92a1cf6454e96"/>
   </p:sldIdLst>
   <p:sldSz cx="12192000" cy="6858000" type="screen16x9"/>
   <p:notesSz cx="6858000" cy="9144000"/>
@@ -337,13 +337,13 @@
         <a:srgbClr val="E7E6E6"/>
       </a:lt2>
       <a:accent1>
-        <a:srgbClr val="183B56"/>
+        <a:srgbClr val="C00000"/>
       </a:accent1>
       <a:accent2>
-        <a:srgbClr val="008C95"/>
+        <a:srgbClr val="70AD47"/>
       </a:accent2>
       <a:accent3>
-        <a:srgbClr val="DF973E"/>
+        <a:srgbClr val="ED7D31"/>
       </a:accent3>
       <a:accent4>
         <a:srgbClr val="FFC000"/>
@@ -821,7 +821,7 @@
               </a:lnSpc>
               <a:defRPr sz="3000" b="1">
                 <a:solidFill>
-                  <a:srgbClr val="183B56"/>
+                  <a:srgbClr val="C00000"/>
                 </a:solidFill>
                 <a:latin typeface="Arial"/>
                 <a:ea typeface="Arial"/>
@@ -830,7 +830,7 @@
             <a:r>
               <a:rPr lang="en-US" sz="3000" b="1">
                 <a:solidFill>
-                  <a:srgbClr val="183B56"/>
+                  <a:srgbClr val="C00000"/>
                 </a:solidFill>
               </a:rPr>
               <a:t xml:space="preserve">Progress2: Distributed </a:t>
@@ -838,7 +838,7 @@
             <a:r>
               <a:rPr lang="en-US" sz="3000" b="1">
                 <a:solidFill>
-                  <a:srgbClr val="183B56"/>
+                  <a:srgbClr val="C00000"/>
                 </a:solidFill>
                 <a:latin typeface="Arial"/>
               </a:rPr>
@@ -862,10 +862,12 @@
             <a:avLst/>
           </a:prstGeom>
           <a:solidFill>
-            <a:srgbClr val="008C95"/>
+            <a:srgbClr val="C55A11"/>
           </a:solidFill>
           <a:ln>
-            <a:noFill/>
+            <a:solidFill>
+              <a:srgbClr val="C55A11"/>
+            </a:solidFill>
           </a:ln>
         </p:spPr>
         <p:txBody>
@@ -876,7 +878,7 @@
           <a:p>
             <a:endParaRPr lang="en-US" sz="1800">
               <a:solidFill>
-                <a:srgbClr val="20354A"/>
+                <a:srgbClr val="C55A11"/>
               </a:solidFill>
               <a:latin typeface="Arial"/>
               <a:ea typeface="Arial"/>
@@ -912,7 +914,7 @@
             <a:r>
               <a:rPr lang="en-US" sz="2400" b="1">
                 <a:solidFill>
-                  <a:srgbClr val="008C95"/>
+                  <a:srgbClr val="70AD47"/>
                 </a:solidFill>
                 <a:latin typeface="Arial"/>
                 <a:ea typeface="Arial"/>
@@ -950,7 +952,7 @@
             <a:r>
               <a:rPr lang="en-US" sz="2400" b="1">
                 <a:solidFill>
-                  <a:srgbClr val="183B56"/>
+                  <a:srgbClr val="333333"/>
                 </a:solidFill>
                 <a:latin typeface="Arial"/>
                 <a:ea typeface="Arial"/>
@@ -988,7 +990,7 @@
             <a:pPr algn="l">
               <a:defRPr sz="1800" b="0">
                 <a:solidFill>
-                  <a:srgbClr val="20354A"/>
+                  <a:srgbClr val="1F1F1F"/>
                 </a:solidFill>
                 <a:latin typeface="Arial"/>
                 <a:ea typeface="Arial"/>
@@ -997,7 +999,7 @@
             <a:r>
               <a:rPr lang="en-US">
                 <a:solidFill>
-                  <a:srgbClr val="20354A"/>
+                  <a:srgbClr val="1F1F1F"/>
                 </a:solidFill>
               </a:rPr>
               <a:t>Reuse REMU's Scan Dump mechanism</a:t>
@@ -1005,7 +1007,7 @@
             <a:r>
               <a:rPr lang="en-US" baseline="30000">
                 <a:solidFill>
-                  <a:srgbClr val="20354A"/>
+                  <a:srgbClr val="1F1F1F"/>
                 </a:solidFill>
               </a:rPr>
               <a:t>[1]</a:t>
@@ -1044,7 +1046,7 @@
             <a:pPr algn="l">
               <a:defRPr sz="1800" b="0">
                 <a:solidFill>
-                  <a:srgbClr val="20354A"/>
+                  <a:srgbClr val="1F1F1F"/>
                 </a:solidFill>
                 <a:latin typeface="Arial"/>
                 <a:ea typeface="Arial"/>
@@ -1053,7 +1055,7 @@
             <a:r>
               <a:rPr lang="en-US" sz="1800">
                 <a:solidFill>
-                  <a:srgbClr val="20354A"/>
+                  <a:srgbClr val="1F1F1F"/>
                 </a:solidFill>
                 <a:latin typeface="Arial"/>
               </a:rPr>
@@ -1062,7 +1064,7 @@
             <a:r>
               <a:rPr lang="en-US" sz="1800">
                 <a:solidFill>
-                  <a:srgbClr val="20354A"/>
+                  <a:srgbClr val="1F1F1F"/>
                 </a:solidFill>
                 <a:latin typeface="Arial"/>
               </a:rPr>
@@ -1071,7 +1073,7 @@
             <a:r>
               <a:rPr lang="en-US" sz="1800">
                 <a:solidFill>
-                  <a:srgbClr val="20354A"/>
+                  <a:srgbClr val="1F1F1F"/>
                 </a:solidFill>
                 <a:latin typeface="Arial"/>
               </a:rPr>
@@ -1108,7 +1110,7 @@
             <a:r>
               <a:rPr lang="en-US" sz="2400" b="1">
                 <a:solidFill>
-                  <a:srgbClr val="008C95"/>
+                  <a:srgbClr val="70AD47"/>
                 </a:solidFill>
                 <a:latin typeface="Arial"/>
                 <a:ea typeface="Arial"/>
@@ -1146,7 +1148,7 @@
             <a:r>
               <a:rPr lang="en-US" sz="2400" b="1">
                 <a:solidFill>
-                  <a:srgbClr val="183B56"/>
+                  <a:srgbClr val="333333"/>
                 </a:solidFill>
                 <a:latin typeface="Arial"/>
                 <a:ea typeface="Arial"/>
@@ -1184,7 +1186,7 @@
             <a:pPr algn="l">
               <a:defRPr sz="1800" b="0">
                 <a:solidFill>
-                  <a:srgbClr val="20354A"/>
+                  <a:srgbClr val="1F1F1F"/>
                 </a:solidFill>
                 <a:latin typeface="Arial"/>
                 <a:ea typeface="Arial"/>
@@ -1193,7 +1195,7 @@
             <a:r>
               <a:rPr lang="en-US" sz="1800">
                 <a:solidFill>
-                  <a:srgbClr val="20354A"/>
+                  <a:srgbClr val="1F1F1F"/>
                 </a:solidFill>
                 <a:latin typeface="Arial"/>
               </a:rPr>
@@ -1202,7 +1204,7 @@
             <a:r>
               <a:rPr lang="en-US" sz="1800" b="1">
                 <a:solidFill>
-                  <a:srgbClr val="183B56"/>
+                  <a:srgbClr val="333333"/>
                 </a:solidFill>
                 <a:latin typeface="Arial"/>
               </a:rPr>
@@ -1239,7 +1241,7 @@
             <a:pPr algn="l">
               <a:defRPr sz="1800" b="0">
                 <a:solidFill>
-                  <a:srgbClr val="20354A"/>
+                  <a:srgbClr val="1F1F1F"/>
                 </a:solidFill>
                 <a:latin typeface="Arial"/>
                 <a:ea typeface="Arial"/>
@@ -1248,7 +1250,7 @@
             <a:r>
               <a:rPr sz="1800">
                 <a:solidFill>
-                  <a:srgbClr val="20354A"/>
+                  <a:srgbClr val="1F1F1F"/>
                 </a:solidFill>
                 <a:latin typeface="Arial"/>
               </a:rPr>
@@ -1285,7 +1287,7 @@
             <a:r>
               <a:rPr lang="en-US" sz="2400" b="1">
                 <a:solidFill>
-                  <a:srgbClr val="008C95"/>
+                  <a:srgbClr val="70AD47"/>
                 </a:solidFill>
                 <a:latin typeface="Arial"/>
                 <a:ea typeface="Arial"/>
@@ -1323,7 +1325,7 @@
             <a:r>
               <a:rPr lang="en-US" sz="2400" b="1">
                 <a:solidFill>
-                  <a:srgbClr val="183B56"/>
+                  <a:srgbClr val="333333"/>
                 </a:solidFill>
                 <a:latin typeface="Arial"/>
                 <a:ea typeface="Arial"/>
@@ -1361,7 +1363,7 @@
             <a:pPr algn="l">
               <a:defRPr sz="1800" b="0">
                 <a:solidFill>
-                  <a:srgbClr val="20354A"/>
+                  <a:srgbClr val="1F1F1F"/>
                 </a:solidFill>
                 <a:latin typeface="Arial"/>
                 <a:ea typeface="Arial"/>
@@ -1370,7 +1372,7 @@
             <a:r>
               <a:rPr lang="en-US" sz="1800">
                 <a:solidFill>
-                  <a:srgbClr val="20354A"/>
+                  <a:srgbClr val="1F1F1F"/>
                 </a:solidFill>
                 <a:latin typeface="Arial"/>
               </a:rPr>
@@ -1379,7 +1381,7 @@
             <a:r>
               <a:rPr lang="en-US" sz="1800" b="1">
                 <a:solidFill>
-                  <a:srgbClr val="183B56"/>
+                  <a:srgbClr val="333333"/>
                 </a:solidFill>
                 <a:latin typeface="Arial"/>
               </a:rPr>
@@ -1416,7 +1418,7 @@
             <a:pPr algn="l">
               <a:defRPr sz="1800" b="0">
                 <a:solidFill>
-                  <a:srgbClr val="20354A"/>
+                  <a:srgbClr val="1F1F1F"/>
                 </a:solidFill>
                 <a:latin typeface="Arial"/>
                 <a:ea typeface="Arial"/>
@@ -1425,7 +1427,7 @@
             <a:r>
               <a:rPr sz="1800">
                 <a:solidFill>
-                  <a:srgbClr val="20354A"/>
+                  <a:srgbClr val="1F1F1F"/>
                 </a:solidFill>
                 <a:latin typeface="Arial"/>
               </a:rPr>
@@ -1443,7 +1445,7 @@
           <p:nvPr/>
         </p:nvPicPr>
         <p:blipFill>
-          <a:blip xmlns:r="http://schemas.openxmlformats.org/officeDocument/2006/relationships" r:embed="R8d9fedf5f1c7412b"/>
+          <a:blip xmlns:r="http://schemas.openxmlformats.org/officeDocument/2006/relationships" r:embed="Ra5f8f4ea5e0d472a"/>
           <a:stretch>
             <a:fillRect/>
           </a:stretch>
@@ -1486,7 +1488,7 @@
             <a:pPr algn="l">
               <a:defRPr sz="2000" b="0">
                 <a:solidFill>
-                  <a:srgbClr val="183B56"/>
+                  <a:srgbClr val="333333"/>
                 </a:solidFill>
                 <a:latin typeface="Arial"/>
                 <a:ea typeface="Arial"/>
@@ -1495,7 +1497,7 @@
             <a:r>
               <a:rPr sz="2000">
                 <a:solidFill>
-                  <a:srgbClr val="183B56"/>
+                  <a:srgbClr val="333333"/>
                 </a:solidFill>
                 <a:latin typeface="Arial"/>
               </a:rPr>
@@ -1506,7 +1508,7 @@
             <a:r>
               <a:rPr lang="en-US" sz="2000">
                 <a:solidFill>
-                  <a:srgbClr val="183B56"/>
+                  <a:srgbClr val="333333"/>
                 </a:solidFill>
                 <a:latin typeface="Arial"/>
               </a:rPr>
@@ -1544,7 +1546,7 @@
             <a:r>
               <a:rPr lang="en-US" sz="1000">
                 <a:solidFill>
-                  <a:srgbClr val="607184"/>
+                  <a:srgbClr val="898989"/>
                 </a:solidFill>
                 <a:latin typeface="Arial"/>
                 <a:ea typeface="Arial"/>
@@ -1582,7 +1584,7 @@
             <a:r>
               <a:rPr lang="en-US" sz="1000">
                 <a:solidFill>
-                  <a:srgbClr val="607184"/>
+                  <a:srgbClr val="898989"/>
                 </a:solidFill>
                 <a:latin typeface="Arial"/>
                 <a:ea typeface="Arial"/>
@@ -1614,13 +1616,13 @@
         <a:srgbClr val="E7E6E6"/>
       </a:lt2>
       <a:accent1>
-        <a:srgbClr val="183B56"/>
+        <a:srgbClr val="C00000"/>
       </a:accent1>
       <a:accent2>
-        <a:srgbClr val="008C95"/>
+        <a:srgbClr val="70AD47"/>
       </a:accent2>
       <a:accent3>
-        <a:srgbClr val="DF973E"/>
+        <a:srgbClr val="ED7D31"/>
       </a:accent3>
       <a:accent4>
         <a:srgbClr val="FFC000"/>
